--- a/docs/pptx/carbo/ritu-carbo-linsubhr-ratio-hosp6.pptx
+++ b/docs/pptx/carbo/ritu-carbo-linsubhr-ratio-hosp6.pptx
@@ -2443,7 +2443,7 @@
           </p:nvSpPr>
           <p:spPr>
             <a:xfrm>
-              <a:off x="1427870" y="2073503"/>
+              <a:off x="1428538" y="2073503"/>
               <a:ext cx="0" cy="3649639"/>
             </a:xfrm>
             <a:custGeom>
@@ -2486,7 +2486,7 @@
           </p:nvSpPr>
           <p:spPr>
             <a:xfrm>
-              <a:off x="3243537" y="2073503"/>
+              <a:off x="3243764" y="2073503"/>
               <a:ext cx="0" cy="3649639"/>
             </a:xfrm>
             <a:custGeom>
@@ -2529,7 +2529,7 @@
           </p:nvSpPr>
           <p:spPr>
             <a:xfrm>
-              <a:off x="5059204" y="2073503"/>
+              <a:off x="5058989" y="2073503"/>
               <a:ext cx="0" cy="3649639"/>
             </a:xfrm>
             <a:custGeom>
@@ -2572,7 +2572,7 @@
           </p:nvSpPr>
           <p:spPr>
             <a:xfrm>
-              <a:off x="6874870" y="2073503"/>
+              <a:off x="6874214" y="2073503"/>
               <a:ext cx="0" cy="3649639"/>
             </a:xfrm>
             <a:custGeom>
@@ -2830,7 +2830,7 @@
           </p:nvSpPr>
           <p:spPr>
             <a:xfrm>
-              <a:off x="2335703" y="2073503"/>
+              <a:off x="2336151" y="2073503"/>
               <a:ext cx="0" cy="3649639"/>
             </a:xfrm>
             <a:custGeom>
@@ -2873,7 +2873,7 @@
           </p:nvSpPr>
           <p:spPr>
             <a:xfrm>
-              <a:off x="4151370" y="2073503"/>
+              <a:off x="4151376" y="2073503"/>
               <a:ext cx="0" cy="3649639"/>
             </a:xfrm>
             <a:custGeom>
@@ -2916,7 +2916,7 @@
           </p:nvSpPr>
           <p:spPr>
             <a:xfrm>
-              <a:off x="5967037" y="2073503"/>
+              <a:off x="5966601" y="2073503"/>
               <a:ext cx="0" cy="3649639"/>
             </a:xfrm>
             <a:custGeom>
@@ -2959,7 +2959,7 @@
           </p:nvSpPr>
           <p:spPr>
             <a:xfrm>
-              <a:off x="7782704" y="2073503"/>
+              <a:off x="7781826" y="2073503"/>
               <a:ext cx="0" cy="3649639"/>
             </a:xfrm>
             <a:custGeom>
@@ -3003,12 +3003,12 @@
           <p:spPr>
             <a:xfrm>
               <a:off x="1172049" y="2073503"/>
-              <a:ext cx="3414742" cy="3483746"/>
+              <a:ext cx="3442384" cy="3483746"/>
             </a:xfrm>
             <a:custGeom>
               <a:avLst/>
               <a:pathLst>
-                <a:path w="3414742" h="3483746">
+                <a:path w="3442384" h="3483746">
                   <a:moveTo>
                     <a:pt x="0" y="3483745"/>
                   </a:moveTo>
@@ -3025,226 +3025,232 @@
                     <a:pt x="286490" y="3483741"/>
                   </a:lnTo>
                   <a:lnTo>
-                    <a:pt x="358112" y="3483739"/>
+                    <a:pt x="358112" y="3483740"/>
                   </a:lnTo>
                   <a:lnTo>
                     <a:pt x="429735" y="3483737"/>
                   </a:lnTo>
                   <a:lnTo>
-                    <a:pt x="501357" y="3483733"/>
-                  </a:lnTo>
-                  <a:lnTo>
-                    <a:pt x="572980" y="3483729"/>
-                  </a:lnTo>
-                  <a:lnTo>
-                    <a:pt x="644602" y="3483722"/>
-                  </a:lnTo>
-                  <a:lnTo>
-                    <a:pt x="716225" y="3483714"/>
-                  </a:lnTo>
-                  <a:lnTo>
-                    <a:pt x="787847" y="3483702"/>
-                  </a:lnTo>
-                  <a:lnTo>
-                    <a:pt x="859470" y="3483686"/>
-                  </a:lnTo>
-                  <a:lnTo>
-                    <a:pt x="931092" y="3483664"/>
-                  </a:lnTo>
-                  <a:lnTo>
-                    <a:pt x="1002715" y="3483635"/>
-                  </a:lnTo>
-                  <a:lnTo>
-                    <a:pt x="1074337" y="3483595"/>
-                  </a:lnTo>
-                  <a:lnTo>
-                    <a:pt x="1145960" y="3483541"/>
-                  </a:lnTo>
-                  <a:lnTo>
-                    <a:pt x="1217582" y="3483467"/>
-                  </a:lnTo>
-                  <a:lnTo>
-                    <a:pt x="1289205" y="3483366"/>
-                  </a:lnTo>
-                  <a:lnTo>
-                    <a:pt x="1360827" y="3483229"/>
-                  </a:lnTo>
-                  <a:lnTo>
-                    <a:pt x="1432450" y="3483044"/>
-                  </a:lnTo>
-                  <a:lnTo>
-                    <a:pt x="1504073" y="3482791"/>
-                  </a:lnTo>
-                  <a:lnTo>
-                    <a:pt x="1575695" y="3482448"/>
-                  </a:lnTo>
-                  <a:lnTo>
-                    <a:pt x="1647318" y="3481981"/>
-                  </a:lnTo>
-                  <a:lnTo>
-                    <a:pt x="1718940" y="3481346"/>
-                  </a:lnTo>
-                  <a:lnTo>
-                    <a:pt x="1790563" y="3480483"/>
-                  </a:lnTo>
-                  <a:lnTo>
-                    <a:pt x="1862185" y="3479310"/>
-                  </a:lnTo>
-                  <a:lnTo>
-                    <a:pt x="1933808" y="3477716"/>
-                  </a:lnTo>
-                  <a:lnTo>
-                    <a:pt x="2005430" y="3475549"/>
-                  </a:lnTo>
-                  <a:lnTo>
-                    <a:pt x="2077053" y="3472602"/>
-                  </a:lnTo>
-                  <a:lnTo>
-                    <a:pt x="2148675" y="3468597"/>
-                  </a:lnTo>
-                  <a:lnTo>
-                    <a:pt x="2220298" y="3463151"/>
-                  </a:lnTo>
-                  <a:lnTo>
-                    <a:pt x="2291920" y="3455749"/>
-                  </a:lnTo>
-                  <a:lnTo>
-                    <a:pt x="2363543" y="3445686"/>
-                  </a:lnTo>
-                  <a:lnTo>
-                    <a:pt x="2435165" y="3432006"/>
-                  </a:lnTo>
-                  <a:lnTo>
-                    <a:pt x="2506788" y="3413408"/>
-                  </a:lnTo>
-                  <a:lnTo>
-                    <a:pt x="2578410" y="3388127"/>
-                  </a:lnTo>
-                  <a:lnTo>
-                    <a:pt x="2650033" y="3353758"/>
-                  </a:lnTo>
-                  <a:lnTo>
-                    <a:pt x="2721655" y="3307037"/>
-                  </a:lnTo>
-                  <a:lnTo>
-                    <a:pt x="2793278" y="3243523"/>
-                  </a:lnTo>
-                  <a:lnTo>
-                    <a:pt x="2864901" y="3157179"/>
-                  </a:lnTo>
-                  <a:lnTo>
-                    <a:pt x="2936523" y="3039802"/>
-                  </a:lnTo>
-                  <a:lnTo>
-                    <a:pt x="3008146" y="2880236"/>
-                  </a:lnTo>
-                  <a:lnTo>
-                    <a:pt x="3079768" y="2663316"/>
-                  </a:lnTo>
-                  <a:lnTo>
-                    <a:pt x="3151391" y="2149526"/>
-                  </a:lnTo>
-                  <a:lnTo>
-                    <a:pt x="3223013" y="1299549"/>
-                  </a:lnTo>
-                  <a:lnTo>
-                    <a:pt x="3289905" y="0"/>
-                  </a:lnTo>
-                  <a:lnTo>
-                    <a:pt x="3414742" y="0"/>
-                  </a:lnTo>
-                  <a:lnTo>
-                    <a:pt x="3366258" y="681753"/>
-                  </a:lnTo>
-                  <a:lnTo>
-                    <a:pt x="3294636" y="1422591"/>
-                  </a:lnTo>
-                  <a:lnTo>
-                    <a:pt x="3223013" y="1967554"/>
-                  </a:lnTo>
-                  <a:lnTo>
-                    <a:pt x="3151391" y="2368430"/>
-                  </a:lnTo>
-                  <a:lnTo>
-                    <a:pt x="3079768" y="2668736"/>
-                  </a:lnTo>
-                  <a:lnTo>
-                    <a:pt x="3008146" y="2985896"/>
-                  </a:lnTo>
-                  <a:lnTo>
-                    <a:pt x="2936523" y="3179634"/>
-                  </a:lnTo>
-                  <a:lnTo>
-                    <a:pt x="2864901" y="3297979"/>
-                  </a:lnTo>
-                  <a:lnTo>
-                    <a:pt x="2793278" y="3370270"/>
-                  </a:lnTo>
-                  <a:lnTo>
-                    <a:pt x="2721655" y="3414429"/>
-                  </a:lnTo>
-                  <a:lnTo>
-                    <a:pt x="2650033" y="3441404"/>
-                  </a:lnTo>
-                  <a:lnTo>
-                    <a:pt x="2578410" y="3457881"/>
-                  </a:lnTo>
-                  <a:lnTo>
-                    <a:pt x="2506788" y="3467947"/>
-                  </a:lnTo>
-                  <a:lnTo>
-                    <a:pt x="2435165" y="3474095"/>
-                  </a:lnTo>
-                  <a:lnTo>
-                    <a:pt x="2363543" y="3477851"/>
-                  </a:lnTo>
-                  <a:lnTo>
-                    <a:pt x="2291920" y="3480145"/>
-                  </a:lnTo>
-                  <a:lnTo>
-                    <a:pt x="2220298" y="3481547"/>
-                  </a:lnTo>
-                  <a:lnTo>
-                    <a:pt x="2148675" y="3482403"/>
-                  </a:lnTo>
-                  <a:lnTo>
-                    <a:pt x="2077053" y="3482926"/>
-                  </a:lnTo>
-                  <a:lnTo>
-                    <a:pt x="2005430" y="3483245"/>
-                  </a:lnTo>
-                  <a:lnTo>
-                    <a:pt x="1933808" y="3483440"/>
-                  </a:lnTo>
-                  <a:lnTo>
-                    <a:pt x="1862185" y="3483559"/>
-                  </a:lnTo>
-                  <a:lnTo>
-                    <a:pt x="1790563" y="3483632"/>
-                  </a:lnTo>
-                  <a:lnTo>
-                    <a:pt x="1718940" y="3483677"/>
-                  </a:lnTo>
-                  <a:lnTo>
-                    <a:pt x="1647318" y="3483704"/>
-                  </a:lnTo>
-                  <a:lnTo>
-                    <a:pt x="1575695" y="3483720"/>
-                  </a:lnTo>
-                  <a:lnTo>
-                    <a:pt x="1504073" y="3483730"/>
-                  </a:lnTo>
-                  <a:lnTo>
-                    <a:pt x="1432450" y="3483737"/>
-                  </a:lnTo>
-                  <a:lnTo>
-                    <a:pt x="1360827" y="3483740"/>
-                  </a:lnTo>
-                  <a:lnTo>
-                    <a:pt x="1289205" y="3483743"/>
-                  </a:lnTo>
-                  <a:lnTo>
-                    <a:pt x="1217582" y="3483744"/>
+                    <a:pt x="501357" y="3483734"/>
+                  </a:lnTo>
+                  <a:lnTo>
+                    <a:pt x="572980" y="3483730"/>
+                  </a:lnTo>
+                  <a:lnTo>
+                    <a:pt x="644602" y="3483724"/>
+                  </a:lnTo>
+                  <a:lnTo>
+                    <a:pt x="716225" y="3483715"/>
+                  </a:lnTo>
+                  <a:lnTo>
+                    <a:pt x="787847" y="3483704"/>
+                  </a:lnTo>
+                  <a:lnTo>
+                    <a:pt x="859470" y="3483689"/>
+                  </a:lnTo>
+                  <a:lnTo>
+                    <a:pt x="931092" y="3483669"/>
+                  </a:lnTo>
+                  <a:lnTo>
+                    <a:pt x="1002715" y="3483641"/>
+                  </a:lnTo>
+                  <a:lnTo>
+                    <a:pt x="1074337" y="3483604"/>
+                  </a:lnTo>
+                  <a:lnTo>
+                    <a:pt x="1145960" y="3483553"/>
+                  </a:lnTo>
+                  <a:lnTo>
+                    <a:pt x="1217582" y="3483484"/>
+                  </a:lnTo>
+                  <a:lnTo>
+                    <a:pt x="1289205" y="3483390"/>
+                  </a:lnTo>
+                  <a:lnTo>
+                    <a:pt x="1360827" y="3483263"/>
+                  </a:lnTo>
+                  <a:lnTo>
+                    <a:pt x="1432450" y="3483090"/>
+                  </a:lnTo>
+                  <a:lnTo>
+                    <a:pt x="1504073" y="3482856"/>
+                  </a:lnTo>
+                  <a:lnTo>
+                    <a:pt x="1575695" y="3482537"/>
+                  </a:lnTo>
+                  <a:lnTo>
+                    <a:pt x="1647318" y="3482105"/>
+                  </a:lnTo>
+                  <a:lnTo>
+                    <a:pt x="1718940" y="3481519"/>
+                  </a:lnTo>
+                  <a:lnTo>
+                    <a:pt x="1790563" y="3480723"/>
+                  </a:lnTo>
+                  <a:lnTo>
+                    <a:pt x="1862185" y="3479642"/>
+                  </a:lnTo>
+                  <a:lnTo>
+                    <a:pt x="1933808" y="3478175"/>
+                  </a:lnTo>
+                  <a:lnTo>
+                    <a:pt x="2005430" y="3476185"/>
+                  </a:lnTo>
+                  <a:lnTo>
+                    <a:pt x="2077053" y="3473483"/>
+                  </a:lnTo>
+                  <a:lnTo>
+                    <a:pt x="2148675" y="3469815"/>
+                  </a:lnTo>
+                  <a:lnTo>
+                    <a:pt x="2220298" y="3464837"/>
+                  </a:lnTo>
+                  <a:lnTo>
+                    <a:pt x="2291920" y="3458079"/>
+                  </a:lnTo>
+                  <a:lnTo>
+                    <a:pt x="2363543" y="3448907"/>
+                  </a:lnTo>
+                  <a:lnTo>
+                    <a:pt x="2435165" y="3436458"/>
+                  </a:lnTo>
+                  <a:lnTo>
+                    <a:pt x="2506788" y="3419560"/>
+                  </a:lnTo>
+                  <a:lnTo>
+                    <a:pt x="2578410" y="3396624"/>
+                  </a:lnTo>
+                  <a:lnTo>
+                    <a:pt x="2650033" y="3365491"/>
+                  </a:lnTo>
+                  <a:lnTo>
+                    <a:pt x="2721655" y="3323234"/>
+                  </a:lnTo>
+                  <a:lnTo>
+                    <a:pt x="2793278" y="3265876"/>
+                  </a:lnTo>
+                  <a:lnTo>
+                    <a:pt x="2864901" y="3188022"/>
+                  </a:lnTo>
+                  <a:lnTo>
+                    <a:pt x="2936523" y="3082348"/>
+                  </a:lnTo>
+                  <a:lnTo>
+                    <a:pt x="3008146" y="2938912"/>
+                  </a:lnTo>
+                  <a:lnTo>
+                    <a:pt x="3079768" y="2744221"/>
+                  </a:lnTo>
+                  <a:lnTo>
+                    <a:pt x="3151391" y="2350618"/>
+                  </a:lnTo>
+                  <a:lnTo>
+                    <a:pt x="3223013" y="1616185"/>
+                  </a:lnTo>
+                  <a:lnTo>
+                    <a:pt x="3294636" y="405734"/>
+                  </a:lnTo>
+                  <a:lnTo>
+                    <a:pt x="3309202" y="0"/>
+                  </a:lnTo>
+                  <a:lnTo>
+                    <a:pt x="3442384" y="0"/>
+                  </a:lnTo>
+                  <a:lnTo>
+                    <a:pt x="3437881" y="76548"/>
+                  </a:lnTo>
+                  <a:lnTo>
+                    <a:pt x="3366258" y="973545"/>
+                  </a:lnTo>
+                  <a:lnTo>
+                    <a:pt x="3294636" y="1634394"/>
+                  </a:lnTo>
+                  <a:lnTo>
+                    <a:pt x="3223013" y="2121264"/>
+                  </a:lnTo>
+                  <a:lnTo>
+                    <a:pt x="3151391" y="2479958"/>
+                  </a:lnTo>
+                  <a:lnTo>
+                    <a:pt x="3079768" y="2796229"/>
+                  </a:lnTo>
+                  <a:lnTo>
+                    <a:pt x="3008146" y="3066600"/>
+                  </a:lnTo>
+                  <a:lnTo>
+                    <a:pt x="2936523" y="3230646"/>
+                  </a:lnTo>
+                  <a:lnTo>
+                    <a:pt x="2864901" y="3330180"/>
+                  </a:lnTo>
+                  <a:lnTo>
+                    <a:pt x="2793278" y="3390571"/>
+                  </a:lnTo>
+                  <a:lnTo>
+                    <a:pt x="2721655" y="3427213"/>
+                  </a:lnTo>
+                  <a:lnTo>
+                    <a:pt x="2650033" y="3449445"/>
+                  </a:lnTo>
+                  <a:lnTo>
+                    <a:pt x="2578410" y="3462934"/>
+                  </a:lnTo>
+                  <a:lnTo>
+                    <a:pt x="2506788" y="3471119"/>
+                  </a:lnTo>
+                  <a:lnTo>
+                    <a:pt x="2435165" y="3476085"/>
+                  </a:lnTo>
+                  <a:lnTo>
+                    <a:pt x="2363543" y="3479098"/>
+                  </a:lnTo>
+                  <a:lnTo>
+                    <a:pt x="2291920" y="3480926"/>
+                  </a:lnTo>
+                  <a:lnTo>
+                    <a:pt x="2220298" y="3482035"/>
+                  </a:lnTo>
+                  <a:lnTo>
+                    <a:pt x="2148675" y="3482708"/>
+                  </a:lnTo>
+                  <a:lnTo>
+                    <a:pt x="2077053" y="3483116"/>
+                  </a:lnTo>
+                  <a:lnTo>
+                    <a:pt x="2005430" y="3483364"/>
+                  </a:lnTo>
+                  <a:lnTo>
+                    <a:pt x="1933808" y="3483514"/>
+                  </a:lnTo>
+                  <a:lnTo>
+                    <a:pt x="1862185" y="3483606"/>
+                  </a:lnTo>
+                  <a:lnTo>
+                    <a:pt x="1790563" y="3483661"/>
+                  </a:lnTo>
+                  <a:lnTo>
+                    <a:pt x="1718940" y="3483695"/>
+                  </a:lnTo>
+                  <a:lnTo>
+                    <a:pt x="1647318" y="3483715"/>
+                  </a:lnTo>
+                  <a:lnTo>
+                    <a:pt x="1575695" y="3483727"/>
+                  </a:lnTo>
+                  <a:lnTo>
+                    <a:pt x="1504073" y="3483735"/>
+                  </a:lnTo>
+                  <a:lnTo>
+                    <a:pt x="1432450" y="3483739"/>
+                  </a:lnTo>
+                  <a:lnTo>
+                    <a:pt x="1360827" y="3483742"/>
+                  </a:lnTo>
+                  <a:lnTo>
+                    <a:pt x="1289205" y="3483744"/>
+                  </a:lnTo>
+                  <a:lnTo>
+                    <a:pt x="1217582" y="3483745"/>
                   </a:lnTo>
                   <a:lnTo>
                     <a:pt x="1145960" y="3483745"/>
@@ -3319,12 +3325,12 @@
           <p:spPr>
             <a:xfrm>
               <a:off x="1172049" y="2073503"/>
-              <a:ext cx="3289905" cy="3483745"/>
+              <a:ext cx="3309202" cy="3483745"/>
             </a:xfrm>
             <a:custGeom>
               <a:avLst/>
               <a:pathLst>
-                <a:path w="3289905" h="3483745">
+                <a:path w="3309202" h="3483745">
                   <a:moveTo>
                     <a:pt x="0" y="3483745"/>
                   </a:moveTo>
@@ -3341,130 +3347,133 @@
                     <a:pt x="286490" y="3483741"/>
                   </a:lnTo>
                   <a:lnTo>
-                    <a:pt x="358112" y="3483739"/>
+                    <a:pt x="358112" y="3483740"/>
                   </a:lnTo>
                   <a:lnTo>
                     <a:pt x="429735" y="3483737"/>
                   </a:lnTo>
                   <a:lnTo>
-                    <a:pt x="501357" y="3483733"/>
-                  </a:lnTo>
-                  <a:lnTo>
-                    <a:pt x="572980" y="3483729"/>
-                  </a:lnTo>
-                  <a:lnTo>
-                    <a:pt x="644602" y="3483722"/>
-                  </a:lnTo>
-                  <a:lnTo>
-                    <a:pt x="716225" y="3483714"/>
-                  </a:lnTo>
-                  <a:lnTo>
-                    <a:pt x="787847" y="3483702"/>
-                  </a:lnTo>
-                  <a:lnTo>
-                    <a:pt x="859470" y="3483686"/>
-                  </a:lnTo>
-                  <a:lnTo>
-                    <a:pt x="931092" y="3483664"/>
-                  </a:lnTo>
-                  <a:lnTo>
-                    <a:pt x="1002715" y="3483635"/>
-                  </a:lnTo>
-                  <a:lnTo>
-                    <a:pt x="1074337" y="3483595"/>
-                  </a:lnTo>
-                  <a:lnTo>
-                    <a:pt x="1145960" y="3483541"/>
-                  </a:lnTo>
-                  <a:lnTo>
-                    <a:pt x="1217582" y="3483467"/>
-                  </a:lnTo>
-                  <a:lnTo>
-                    <a:pt x="1289205" y="3483366"/>
-                  </a:lnTo>
-                  <a:lnTo>
-                    <a:pt x="1360827" y="3483229"/>
-                  </a:lnTo>
-                  <a:lnTo>
-                    <a:pt x="1432450" y="3483044"/>
-                  </a:lnTo>
-                  <a:lnTo>
-                    <a:pt x="1504073" y="3482791"/>
-                  </a:lnTo>
-                  <a:lnTo>
-                    <a:pt x="1575695" y="3482448"/>
-                  </a:lnTo>
-                  <a:lnTo>
-                    <a:pt x="1647318" y="3481981"/>
-                  </a:lnTo>
-                  <a:lnTo>
-                    <a:pt x="1718940" y="3481346"/>
-                  </a:lnTo>
-                  <a:lnTo>
-                    <a:pt x="1790563" y="3480483"/>
-                  </a:lnTo>
-                  <a:lnTo>
-                    <a:pt x="1862185" y="3479310"/>
-                  </a:lnTo>
-                  <a:lnTo>
-                    <a:pt x="1933808" y="3477716"/>
-                  </a:lnTo>
-                  <a:lnTo>
-                    <a:pt x="2005430" y="3475549"/>
-                  </a:lnTo>
-                  <a:lnTo>
-                    <a:pt x="2077053" y="3472602"/>
-                  </a:lnTo>
-                  <a:lnTo>
-                    <a:pt x="2148675" y="3468597"/>
-                  </a:lnTo>
-                  <a:lnTo>
-                    <a:pt x="2220298" y="3463151"/>
-                  </a:lnTo>
-                  <a:lnTo>
-                    <a:pt x="2291920" y="3455749"/>
-                  </a:lnTo>
-                  <a:lnTo>
-                    <a:pt x="2363543" y="3445686"/>
-                  </a:lnTo>
-                  <a:lnTo>
-                    <a:pt x="2435165" y="3432006"/>
-                  </a:lnTo>
-                  <a:lnTo>
-                    <a:pt x="2506788" y="3413408"/>
-                  </a:lnTo>
-                  <a:lnTo>
-                    <a:pt x="2578410" y="3388127"/>
-                  </a:lnTo>
-                  <a:lnTo>
-                    <a:pt x="2650033" y="3353758"/>
-                  </a:lnTo>
-                  <a:lnTo>
-                    <a:pt x="2721655" y="3307037"/>
-                  </a:lnTo>
-                  <a:lnTo>
-                    <a:pt x="2793278" y="3243523"/>
-                  </a:lnTo>
-                  <a:lnTo>
-                    <a:pt x="2864901" y="3157179"/>
-                  </a:lnTo>
-                  <a:lnTo>
-                    <a:pt x="2936523" y="3039802"/>
-                  </a:lnTo>
-                  <a:lnTo>
-                    <a:pt x="3008146" y="2880236"/>
-                  </a:lnTo>
-                  <a:lnTo>
-                    <a:pt x="3079768" y="2663316"/>
-                  </a:lnTo>
-                  <a:lnTo>
-                    <a:pt x="3151391" y="2149526"/>
-                  </a:lnTo>
-                  <a:lnTo>
-                    <a:pt x="3223013" y="1299549"/>
-                  </a:lnTo>
-                  <a:lnTo>
-                    <a:pt x="3289905" y="0"/>
+                    <a:pt x="501357" y="3483734"/>
+                  </a:lnTo>
+                  <a:lnTo>
+                    <a:pt x="572980" y="3483730"/>
+                  </a:lnTo>
+                  <a:lnTo>
+                    <a:pt x="644602" y="3483724"/>
+                  </a:lnTo>
+                  <a:lnTo>
+                    <a:pt x="716225" y="3483715"/>
+                  </a:lnTo>
+                  <a:lnTo>
+                    <a:pt x="787847" y="3483704"/>
+                  </a:lnTo>
+                  <a:lnTo>
+                    <a:pt x="859470" y="3483689"/>
+                  </a:lnTo>
+                  <a:lnTo>
+                    <a:pt x="931092" y="3483669"/>
+                  </a:lnTo>
+                  <a:lnTo>
+                    <a:pt x="1002715" y="3483641"/>
+                  </a:lnTo>
+                  <a:lnTo>
+                    <a:pt x="1074337" y="3483604"/>
+                  </a:lnTo>
+                  <a:lnTo>
+                    <a:pt x="1145960" y="3483553"/>
+                  </a:lnTo>
+                  <a:lnTo>
+                    <a:pt x="1217582" y="3483484"/>
+                  </a:lnTo>
+                  <a:lnTo>
+                    <a:pt x="1289205" y="3483390"/>
+                  </a:lnTo>
+                  <a:lnTo>
+                    <a:pt x="1360827" y="3483263"/>
+                  </a:lnTo>
+                  <a:lnTo>
+                    <a:pt x="1432450" y="3483090"/>
+                  </a:lnTo>
+                  <a:lnTo>
+                    <a:pt x="1504073" y="3482856"/>
+                  </a:lnTo>
+                  <a:lnTo>
+                    <a:pt x="1575695" y="3482537"/>
+                  </a:lnTo>
+                  <a:lnTo>
+                    <a:pt x="1647318" y="3482105"/>
+                  </a:lnTo>
+                  <a:lnTo>
+                    <a:pt x="1718940" y="3481519"/>
+                  </a:lnTo>
+                  <a:lnTo>
+                    <a:pt x="1790563" y="3480723"/>
+                  </a:lnTo>
+                  <a:lnTo>
+                    <a:pt x="1862185" y="3479642"/>
+                  </a:lnTo>
+                  <a:lnTo>
+                    <a:pt x="1933808" y="3478175"/>
+                  </a:lnTo>
+                  <a:lnTo>
+                    <a:pt x="2005430" y="3476185"/>
+                  </a:lnTo>
+                  <a:lnTo>
+                    <a:pt x="2077053" y="3473483"/>
+                  </a:lnTo>
+                  <a:lnTo>
+                    <a:pt x="2148675" y="3469815"/>
+                  </a:lnTo>
+                  <a:lnTo>
+                    <a:pt x="2220298" y="3464837"/>
+                  </a:lnTo>
+                  <a:lnTo>
+                    <a:pt x="2291920" y="3458079"/>
+                  </a:lnTo>
+                  <a:lnTo>
+                    <a:pt x="2363543" y="3448907"/>
+                  </a:lnTo>
+                  <a:lnTo>
+                    <a:pt x="2435165" y="3436458"/>
+                  </a:lnTo>
+                  <a:lnTo>
+                    <a:pt x="2506788" y="3419560"/>
+                  </a:lnTo>
+                  <a:lnTo>
+                    <a:pt x="2578410" y="3396624"/>
+                  </a:lnTo>
+                  <a:lnTo>
+                    <a:pt x="2650033" y="3365491"/>
+                  </a:lnTo>
+                  <a:lnTo>
+                    <a:pt x="2721655" y="3323234"/>
+                  </a:lnTo>
+                  <a:lnTo>
+                    <a:pt x="2793278" y="3265876"/>
+                  </a:lnTo>
+                  <a:lnTo>
+                    <a:pt x="2864901" y="3188022"/>
+                  </a:lnTo>
+                  <a:lnTo>
+                    <a:pt x="2936523" y="3082348"/>
+                  </a:lnTo>
+                  <a:lnTo>
+                    <a:pt x="3008146" y="2938912"/>
+                  </a:lnTo>
+                  <a:lnTo>
+                    <a:pt x="3079768" y="2744221"/>
+                  </a:lnTo>
+                  <a:lnTo>
+                    <a:pt x="3151391" y="2350618"/>
+                  </a:lnTo>
+                  <a:lnTo>
+                    <a:pt x="3223013" y="1616185"/>
+                  </a:lnTo>
+                  <a:lnTo>
+                    <a:pt x="3294636" y="405734"/>
+                  </a:lnTo>
+                  <a:lnTo>
+                    <a:pt x="3309202" y="0"/>
                   </a:lnTo>
                 </a:path>
               </a:pathLst>
@@ -3485,107 +3494,110 @@
           <p:spPr>
             <a:xfrm>
               <a:off x="1172049" y="2073503"/>
-              <a:ext cx="3414742" cy="3483746"/>
+              <a:ext cx="3442384" cy="3483746"/>
             </a:xfrm>
             <a:custGeom>
               <a:avLst/>
               <a:pathLst>
-                <a:path w="3414742" h="3483746">
+                <a:path w="3442384" h="3483746">
                   <a:moveTo>
-                    <a:pt x="3414742" y="0"/>
+                    <a:pt x="3442384" y="0"/>
                   </a:moveTo>
                   <a:lnTo>
-                    <a:pt x="3366258" y="681753"/>
-                  </a:lnTo>
-                  <a:lnTo>
-                    <a:pt x="3294636" y="1422591"/>
-                  </a:lnTo>
-                  <a:lnTo>
-                    <a:pt x="3223013" y="1967554"/>
-                  </a:lnTo>
-                  <a:lnTo>
-                    <a:pt x="3151391" y="2368430"/>
-                  </a:lnTo>
-                  <a:lnTo>
-                    <a:pt x="3079768" y="2668736"/>
-                  </a:lnTo>
-                  <a:lnTo>
-                    <a:pt x="3008146" y="2985896"/>
-                  </a:lnTo>
-                  <a:lnTo>
-                    <a:pt x="2936523" y="3179634"/>
-                  </a:lnTo>
-                  <a:lnTo>
-                    <a:pt x="2864901" y="3297979"/>
-                  </a:lnTo>
-                  <a:lnTo>
-                    <a:pt x="2793278" y="3370270"/>
-                  </a:lnTo>
-                  <a:lnTo>
-                    <a:pt x="2721655" y="3414429"/>
-                  </a:lnTo>
-                  <a:lnTo>
-                    <a:pt x="2650033" y="3441404"/>
-                  </a:lnTo>
-                  <a:lnTo>
-                    <a:pt x="2578410" y="3457881"/>
-                  </a:lnTo>
-                  <a:lnTo>
-                    <a:pt x="2506788" y="3467947"/>
-                  </a:lnTo>
-                  <a:lnTo>
-                    <a:pt x="2435165" y="3474095"/>
-                  </a:lnTo>
-                  <a:lnTo>
-                    <a:pt x="2363543" y="3477851"/>
-                  </a:lnTo>
-                  <a:lnTo>
-                    <a:pt x="2291920" y="3480145"/>
-                  </a:lnTo>
-                  <a:lnTo>
-                    <a:pt x="2220298" y="3481547"/>
-                  </a:lnTo>
-                  <a:lnTo>
-                    <a:pt x="2148675" y="3482403"/>
-                  </a:lnTo>
-                  <a:lnTo>
-                    <a:pt x="2077053" y="3482926"/>
-                  </a:lnTo>
-                  <a:lnTo>
-                    <a:pt x="2005430" y="3483245"/>
-                  </a:lnTo>
-                  <a:lnTo>
-                    <a:pt x="1933808" y="3483440"/>
-                  </a:lnTo>
-                  <a:lnTo>
-                    <a:pt x="1862185" y="3483559"/>
-                  </a:lnTo>
-                  <a:lnTo>
-                    <a:pt x="1790563" y="3483632"/>
-                  </a:lnTo>
-                  <a:lnTo>
-                    <a:pt x="1718940" y="3483677"/>
-                  </a:lnTo>
-                  <a:lnTo>
-                    <a:pt x="1647318" y="3483704"/>
-                  </a:lnTo>
-                  <a:lnTo>
-                    <a:pt x="1575695" y="3483720"/>
-                  </a:lnTo>
-                  <a:lnTo>
-                    <a:pt x="1504073" y="3483730"/>
-                  </a:lnTo>
-                  <a:lnTo>
-                    <a:pt x="1432450" y="3483737"/>
-                  </a:lnTo>
-                  <a:lnTo>
-                    <a:pt x="1360827" y="3483740"/>
-                  </a:lnTo>
-                  <a:lnTo>
-                    <a:pt x="1289205" y="3483743"/>
-                  </a:lnTo>
-                  <a:lnTo>
-                    <a:pt x="1217582" y="3483744"/>
+                    <a:pt x="3437881" y="76548"/>
+                  </a:lnTo>
+                  <a:lnTo>
+                    <a:pt x="3366258" y="973545"/>
+                  </a:lnTo>
+                  <a:lnTo>
+                    <a:pt x="3294636" y="1634394"/>
+                  </a:lnTo>
+                  <a:lnTo>
+                    <a:pt x="3223013" y="2121264"/>
+                  </a:lnTo>
+                  <a:lnTo>
+                    <a:pt x="3151391" y="2479958"/>
+                  </a:lnTo>
+                  <a:lnTo>
+                    <a:pt x="3079768" y="2796229"/>
+                  </a:lnTo>
+                  <a:lnTo>
+                    <a:pt x="3008146" y="3066600"/>
+                  </a:lnTo>
+                  <a:lnTo>
+                    <a:pt x="2936523" y="3230646"/>
+                  </a:lnTo>
+                  <a:lnTo>
+                    <a:pt x="2864901" y="3330180"/>
+                  </a:lnTo>
+                  <a:lnTo>
+                    <a:pt x="2793278" y="3390571"/>
+                  </a:lnTo>
+                  <a:lnTo>
+                    <a:pt x="2721655" y="3427213"/>
+                  </a:lnTo>
+                  <a:lnTo>
+                    <a:pt x="2650033" y="3449445"/>
+                  </a:lnTo>
+                  <a:lnTo>
+                    <a:pt x="2578410" y="3462934"/>
+                  </a:lnTo>
+                  <a:lnTo>
+                    <a:pt x="2506788" y="3471119"/>
+                  </a:lnTo>
+                  <a:lnTo>
+                    <a:pt x="2435165" y="3476085"/>
+                  </a:lnTo>
+                  <a:lnTo>
+                    <a:pt x="2363543" y="3479098"/>
+                  </a:lnTo>
+                  <a:lnTo>
+                    <a:pt x="2291920" y="3480926"/>
+                  </a:lnTo>
+                  <a:lnTo>
+                    <a:pt x="2220298" y="3482035"/>
+                  </a:lnTo>
+                  <a:lnTo>
+                    <a:pt x="2148675" y="3482708"/>
+                  </a:lnTo>
+                  <a:lnTo>
+                    <a:pt x="2077053" y="3483116"/>
+                  </a:lnTo>
+                  <a:lnTo>
+                    <a:pt x="2005430" y="3483364"/>
+                  </a:lnTo>
+                  <a:lnTo>
+                    <a:pt x="1933808" y="3483514"/>
+                  </a:lnTo>
+                  <a:lnTo>
+                    <a:pt x="1862185" y="3483606"/>
+                  </a:lnTo>
+                  <a:lnTo>
+                    <a:pt x="1790563" y="3483661"/>
+                  </a:lnTo>
+                  <a:lnTo>
+                    <a:pt x="1718940" y="3483695"/>
+                  </a:lnTo>
+                  <a:lnTo>
+                    <a:pt x="1647318" y="3483715"/>
+                  </a:lnTo>
+                  <a:lnTo>
+                    <a:pt x="1575695" y="3483727"/>
+                  </a:lnTo>
+                  <a:lnTo>
+                    <a:pt x="1504073" y="3483735"/>
+                  </a:lnTo>
+                  <a:lnTo>
+                    <a:pt x="1432450" y="3483739"/>
+                  </a:lnTo>
+                  <a:lnTo>
+                    <a:pt x="1360827" y="3483742"/>
+                  </a:lnTo>
+                  <a:lnTo>
+                    <a:pt x="1289205" y="3483744"/>
+                  </a:lnTo>
+                  <a:lnTo>
+                    <a:pt x="1217582" y="3483745"/>
                   </a:lnTo>
                   <a:lnTo>
                     <a:pt x="1145960" y="3483745"/>
@@ -3657,12 +3669,12 @@
           <p:spPr>
             <a:xfrm>
               <a:off x="1172049" y="2073503"/>
-              <a:ext cx="3335887" cy="3483746"/>
+              <a:ext cx="3361125" cy="3483746"/>
             </a:xfrm>
             <a:custGeom>
               <a:avLst/>
               <a:pathLst>
-                <a:path w="3335887" h="3483746">
+                <a:path w="3361125" h="3483746">
                   <a:moveTo>
                     <a:pt x="0" y="3483746"/>
                   </a:moveTo>
@@ -3691,121 +3703,121 @@
                     <a:pt x="572980" y="3483746"/>
                   </a:lnTo>
                   <a:lnTo>
-                    <a:pt x="644602" y="3483745"/>
+                    <a:pt x="644602" y="3483746"/>
                   </a:lnTo>
                   <a:lnTo>
                     <a:pt x="716225" y="3483745"/>
                   </a:lnTo>
                   <a:lnTo>
-                    <a:pt x="787847" y="3483744"/>
-                  </a:lnTo>
-                  <a:lnTo>
-                    <a:pt x="859470" y="3483743"/>
-                  </a:lnTo>
-                  <a:lnTo>
-                    <a:pt x="931092" y="3483741"/>
-                  </a:lnTo>
-                  <a:lnTo>
-                    <a:pt x="1002715" y="3483739"/>
-                  </a:lnTo>
-                  <a:lnTo>
-                    <a:pt x="1074337" y="3483735"/>
-                  </a:lnTo>
-                  <a:lnTo>
-                    <a:pt x="1145960" y="3483730"/>
-                  </a:lnTo>
-                  <a:lnTo>
-                    <a:pt x="1217582" y="3483722"/>
-                  </a:lnTo>
-                  <a:lnTo>
-                    <a:pt x="1289205" y="3483709"/>
-                  </a:lnTo>
-                  <a:lnTo>
-                    <a:pt x="1360827" y="3483691"/>
-                  </a:lnTo>
-                  <a:lnTo>
-                    <a:pt x="1432450" y="3483664"/>
-                  </a:lnTo>
-                  <a:lnTo>
-                    <a:pt x="1504073" y="3483623"/>
-                  </a:lnTo>
-                  <a:lnTo>
-                    <a:pt x="1575695" y="3483562"/>
-                  </a:lnTo>
-                  <a:lnTo>
-                    <a:pt x="1647318" y="3483472"/>
-                  </a:lnTo>
-                  <a:lnTo>
-                    <a:pt x="1718940" y="3483337"/>
-                  </a:lnTo>
-                  <a:lnTo>
-                    <a:pt x="1790563" y="3483136"/>
-                  </a:lnTo>
-                  <a:lnTo>
-                    <a:pt x="1862185" y="3482835"/>
-                  </a:lnTo>
-                  <a:lnTo>
-                    <a:pt x="1933808" y="3482387"/>
-                  </a:lnTo>
-                  <a:lnTo>
-                    <a:pt x="2005430" y="3481719"/>
-                  </a:lnTo>
-                  <a:lnTo>
-                    <a:pt x="2077053" y="3480722"/>
-                  </a:lnTo>
-                  <a:lnTo>
-                    <a:pt x="2148675" y="3479234"/>
-                  </a:lnTo>
-                  <a:lnTo>
-                    <a:pt x="2220298" y="3477015"/>
-                  </a:lnTo>
-                  <a:lnTo>
-                    <a:pt x="2291920" y="3473705"/>
-                  </a:lnTo>
-                  <a:lnTo>
-                    <a:pt x="2363543" y="3468767"/>
-                  </a:lnTo>
-                  <a:lnTo>
-                    <a:pt x="2435165" y="3461400"/>
-                  </a:lnTo>
-                  <a:lnTo>
-                    <a:pt x="2506788" y="3450410"/>
-                  </a:lnTo>
-                  <a:lnTo>
-                    <a:pt x="2578410" y="3434015"/>
-                  </a:lnTo>
-                  <a:lnTo>
-                    <a:pt x="2650033" y="3409557"/>
-                  </a:lnTo>
-                  <a:lnTo>
-                    <a:pt x="2721655" y="3373071"/>
-                  </a:lnTo>
-                  <a:lnTo>
-                    <a:pt x="2793278" y="3318641"/>
-                  </a:lnTo>
-                  <a:lnTo>
-                    <a:pt x="2864901" y="3237442"/>
-                  </a:lnTo>
-                  <a:lnTo>
-                    <a:pt x="2936523" y="3116310"/>
-                  </a:lnTo>
-                  <a:lnTo>
-                    <a:pt x="3008146" y="2935606"/>
-                  </a:lnTo>
-                  <a:lnTo>
-                    <a:pt x="3079768" y="2666031"/>
-                  </a:lnTo>
-                  <a:lnTo>
-                    <a:pt x="3151391" y="2263879"/>
-                  </a:lnTo>
-                  <a:lnTo>
-                    <a:pt x="3223013" y="1663949"/>
-                  </a:lnTo>
-                  <a:lnTo>
-                    <a:pt x="3294636" y="768974"/>
-                  </a:lnTo>
-                  <a:lnTo>
-                    <a:pt x="3335887" y="0"/>
+                    <a:pt x="787847" y="3483745"/>
+                  </a:lnTo>
+                  <a:lnTo>
+                    <a:pt x="859470" y="3483744"/>
+                  </a:lnTo>
+                  <a:lnTo>
+                    <a:pt x="931092" y="3483742"/>
+                  </a:lnTo>
+                  <a:lnTo>
+                    <a:pt x="1002715" y="3483740"/>
+                  </a:lnTo>
+                  <a:lnTo>
+                    <a:pt x="1074337" y="3483737"/>
+                  </a:lnTo>
+                  <a:lnTo>
+                    <a:pt x="1145960" y="3483733"/>
+                  </a:lnTo>
+                  <a:lnTo>
+                    <a:pt x="1217582" y="3483726"/>
+                  </a:lnTo>
+                  <a:lnTo>
+                    <a:pt x="1289205" y="3483716"/>
+                  </a:lnTo>
+                  <a:lnTo>
+                    <a:pt x="1360827" y="3483701"/>
+                  </a:lnTo>
+                  <a:lnTo>
+                    <a:pt x="1432450" y="3483679"/>
+                  </a:lnTo>
+                  <a:lnTo>
+                    <a:pt x="1504073" y="3483645"/>
+                  </a:lnTo>
+                  <a:lnTo>
+                    <a:pt x="1575695" y="3483595"/>
+                  </a:lnTo>
+                  <a:lnTo>
+                    <a:pt x="1647318" y="3483519"/>
+                  </a:lnTo>
+                  <a:lnTo>
+                    <a:pt x="1718940" y="3483407"/>
+                  </a:lnTo>
+                  <a:lnTo>
+                    <a:pt x="1790563" y="3483238"/>
+                  </a:lnTo>
+                  <a:lnTo>
+                    <a:pt x="1862185" y="3482986"/>
+                  </a:lnTo>
+                  <a:lnTo>
+                    <a:pt x="1933808" y="3482610"/>
+                  </a:lnTo>
+                  <a:lnTo>
+                    <a:pt x="2005430" y="3482046"/>
+                  </a:lnTo>
+                  <a:lnTo>
+                    <a:pt x="2077053" y="3481204"/>
+                  </a:lnTo>
+                  <a:lnTo>
+                    <a:pt x="2148675" y="3479943"/>
+                  </a:lnTo>
+                  <a:lnTo>
+                    <a:pt x="2220298" y="3478058"/>
+                  </a:lnTo>
+                  <a:lnTo>
+                    <a:pt x="2291920" y="3475238"/>
+                  </a:lnTo>
+                  <a:lnTo>
+                    <a:pt x="2363543" y="3471020"/>
+                  </a:lnTo>
+                  <a:lnTo>
+                    <a:pt x="2435165" y="3464712"/>
+                  </a:lnTo>
+                  <a:lnTo>
+                    <a:pt x="2506788" y="3455277"/>
+                  </a:lnTo>
+                  <a:lnTo>
+                    <a:pt x="2578410" y="3441165"/>
+                  </a:lnTo>
+                  <a:lnTo>
+                    <a:pt x="2650033" y="3420057"/>
+                  </a:lnTo>
+                  <a:lnTo>
+                    <a:pt x="2721655" y="3388487"/>
+                  </a:lnTo>
+                  <a:lnTo>
+                    <a:pt x="2793278" y="3341268"/>
+                  </a:lnTo>
+                  <a:lnTo>
+                    <a:pt x="2864901" y="3270642"/>
+                  </a:lnTo>
+                  <a:lnTo>
+                    <a:pt x="2936523" y="3165008"/>
+                  </a:lnTo>
+                  <a:lnTo>
+                    <a:pt x="3008146" y="3007012"/>
+                  </a:lnTo>
+                  <a:lnTo>
+                    <a:pt x="3079768" y="2770699"/>
+                  </a:lnTo>
+                  <a:lnTo>
+                    <a:pt x="3151391" y="2417247"/>
+                  </a:lnTo>
+                  <a:lnTo>
+                    <a:pt x="3223013" y="1888591"/>
+                  </a:lnTo>
+                  <a:lnTo>
+                    <a:pt x="3294636" y="1097886"/>
+                  </a:lnTo>
+                  <a:lnTo>
+                    <a:pt x="3361125" y="0"/>
                   </a:lnTo>
                 </a:path>
               </a:pathLst>
@@ -3877,7 +3889,7 @@
           </p:nvSpPr>
           <p:spPr>
             <a:xfrm>
-              <a:off x="4254372" y="2073503"/>
+              <a:off x="4278722" y="2073503"/>
               <a:ext cx="0" cy="3649639"/>
             </a:xfrm>
             <a:custGeom>
@@ -4150,7 +4162,7 @@
           </p:nvSpPr>
           <p:spPr>
             <a:xfrm>
-              <a:off x="2254916" y="5785772"/>
+              <a:off x="2255364" y="5785772"/>
               <a:ext cx="161574" cy="80101"/>
             </a:xfrm>
             <a:prstGeom prst="rect">
@@ -4196,7 +4208,7 @@
           </p:nvSpPr>
           <p:spPr>
             <a:xfrm>
-              <a:off x="4120281" y="5785772"/>
+              <a:off x="4120286" y="5785772"/>
               <a:ext cx="62179" cy="80101"/>
             </a:xfrm>
             <a:prstGeom prst="rect">
@@ -4242,7 +4254,7 @@
           </p:nvSpPr>
           <p:spPr>
             <a:xfrm>
-              <a:off x="5904858" y="5785772"/>
+              <a:off x="5904422" y="5785772"/>
               <a:ext cx="124358" cy="80101"/>
             </a:xfrm>
             <a:prstGeom prst="rect">
@@ -4288,7 +4300,7 @@
           </p:nvSpPr>
           <p:spPr>
             <a:xfrm>
-              <a:off x="7720525" y="5785772"/>
+              <a:off x="7719647" y="5785772"/>
               <a:ext cx="124358" cy="80101"/>
             </a:xfrm>
             <a:prstGeom prst="rect">
@@ -4459,7 +4471,7 @@
                   <a:latin typeface="Helvetica"/>
                   <a:cs typeface="Helvetica"/>
                 </a:rPr>
-                <a:t>subHR per 10 % decline: 0.01 (0.00-0.02), p = &lt;0.001  |  per IQR decline (Δ = 26.4 %): 0.00 (0.00-0.00)  |  IQR: [-11.1, 15.3] %</a:t>
+                <a:t>subHR per 10 % decline: 0.01 (0.00-0.02), p = &lt;0.001  |  per IQR decline (Δ = 26.4 %): 0.00 (0.00-0.00)  |  IQR: [-11.1, 15.4] %</a:t>
               </a:r>
             </a:p>
           </p:txBody>
